--- a/maven_training/pdf/MSS_Project_Overview_PROTO.pptx
+++ b/maven_training/pdf/MSS_Project_Overview_PROTO.pptx
@@ -3475,7 +3475,7 @@
         <p:spPr>
           <a:xfrm>
             <a:off x="91440" y="2304288"/>
-            <a:ext cx="2267712" cy="2450592"/>
+            <a:ext cx="2267712" cy="2249424"/>
           </a:xfrm>
           <a:prstGeom prst="rect">
             <a:avLst/>
@@ -3518,7 +3518,7 @@
         <p:spPr>
           <a:xfrm>
             <a:off x="164592" y="2340864"/>
-            <a:ext cx="2121408" cy="2377440"/>
+            <a:ext cx="2121408" cy="2176272"/>
           </a:xfrm>
           <a:prstGeom prst="rect">
             <a:avLst/>
@@ -3817,7 +3817,7 @@
         <p:spPr>
           <a:xfrm>
             <a:off x="2377440" y="2304288"/>
-            <a:ext cx="2267712" cy="2450592"/>
+            <a:ext cx="2267712" cy="2249424"/>
           </a:xfrm>
           <a:prstGeom prst="rect">
             <a:avLst/>
@@ -3860,7 +3860,7 @@
         <p:spPr>
           <a:xfrm>
             <a:off x="2450592" y="2340864"/>
-            <a:ext cx="2121408" cy="2377440"/>
+            <a:ext cx="2121408" cy="2176272"/>
           </a:xfrm>
           <a:prstGeom prst="rect">
             <a:avLst/>
@@ -3991,7 +3991,7 @@
                   <a:srgbClr val="E2E8F0"/>
                 </a:solidFill>
               </a:rPr>
-              <a:t>17/25-series · S6 · G2/G9</a:t>
+              <a:t>17/25-series · S6 · G2</a:t>
             </a:r>
           </a:p>
         </p:txBody>
@@ -4159,7 +4159,7 @@
         <p:spPr>
           <a:xfrm>
             <a:off x="4663440" y="2304288"/>
-            <a:ext cx="2267712" cy="2450592"/>
+            <a:ext cx="2267712" cy="2249424"/>
           </a:xfrm>
           <a:prstGeom prst="rect">
             <a:avLst/>
@@ -4202,7 +4202,7 @@
         <p:spPr>
           <a:xfrm>
             <a:off x="4736592" y="2340864"/>
-            <a:ext cx="2121408" cy="2377440"/>
+            <a:ext cx="2121408" cy="2176272"/>
           </a:xfrm>
           <a:prstGeom prst="rect">
             <a:avLst/>
